--- a/public/downloads/US-114051-L3-Chairing-the-Meeting.pptx
+++ b/public/downloads/US-114051-L3-Chairing-the-Meeting.pptx
@@ -2136,7 +2136,7 @@
                 <a:ea typeface="Aptos" pitchFamily="34" charset="-122"/>
                 <a:cs typeface="Aptos" pitchFamily="34" charset="-120"/>
               </a:rPr>
-              <a:t>Friday, 11 Sep 2026 · 09h00 – 14h00</a:t>
+              <a:t>Friday, 4 Sep 2026 · 09h00 – 14h00</a:t>
             </a:r>
             <a:endParaRPr lang="en-US" sz="1800" dirty="0"/>
           </a:p>
@@ -3835,7 +3835,7 @@
                 <a:ea typeface="Aptos" pitchFamily="34" charset="-122"/>
                 <a:cs typeface="Aptos" pitchFamily="34" charset="-120"/>
               </a:rPr>
-              <a:t>Agreed conventions applied throughout, per the standing procedures of the organisation.</a:t>
+              <a:t>Agreed conventions applied throughout, per the standing procedures of the company.</a:t>
             </a:r>
             <a:endParaRPr lang="en-US" sz="1800" dirty="0"/>
           </a:p>
